--- a/decks/englang-opinion/englang-opinion_ch6_persuade-and-imply.pptx
+++ b/decks/englang-opinion/englang-opinion_ch6_persuade-and-imply.pptx
@@ -127,30 +127,30 @@
   <p:extLst>
     <p:ext uri="{521415D9-36F7-43E2-AB2F-B90AF26B5E84}">
       <p14:sectionLst xmlns:p14="http://schemas.microsoft.com/office/powerpoint/2010/main">
-        <p14:section name="Opening" id="{cf1d34f9-5f22-2f6c-83cb-dbf0409139fd}">
+        <p14:section name="Opening" id="{b951beae-5e64-8ce4-2f25-a55c2cb5eb0d}">
           <p14:sldIdLst>
             <p14:sldId id="256"/>
           </p14:sldIdLst>
         </p14:section>
-        <p14:section name="Gate" id="{3d7631df-aefd-221f-3991-8c468012e641}">
+        <p14:section name="Gate" id="{5fea84d2-ac33-04a7-455c-06516c084113}">
           <p14:sldIdLst>
             <p14:sldId id="257"/>
             <p14:sldId id="258"/>
           </p14:sldIdLst>
         </p14:section>
-        <p14:section name="Pre-teach" id="{eab94cb4-9d99-fcbc-90a7-8ece7151a342}">
+        <p14:section name="Pre-teach" id="{b4e1fe19-0a9c-6aa6-465f-94554a418f1e}">
           <p14:sldIdLst>
             <p14:sldId id="259"/>
             <p14:sldId id="260"/>
           </p14:sldIdLst>
         </p14:section>
-        <p14:section name="Read-along" id="{ba7752f5-c124-ed33-dd6f-5c77d042ba5b}">
+        <p14:section name="Read-along" id="{e6f50059-da89-73cb-634c-4e168f57472b}">
           <p14:sldIdLst>
             <p14:sldId id="261"/>
             <p14:sldId id="262"/>
           </p14:sldIdLst>
         </p14:section>
-        <p14:section name="Teach" id="{45605e8f-59ad-e816-28f0-cf6623de5a7e}">
+        <p14:section name="Teach" id="{4627cfcb-53fa-52c9-8285-f5c15b6aca0f}">
           <p14:sldIdLst>
             <p14:sldId id="263"/>
             <p14:sldId id="264"/>
@@ -158,7 +158,7 @@
             <p14:sldId id="266"/>
           </p14:sldIdLst>
         </p14:section>
-        <p14:section name="Routes" id="{37554b55-9c4d-0fd9-492b-01d30cf914dd}">
+        <p14:section name="Routes" id="{391cb517-84cf-84bc-a9d9-43260ff2f754}">
           <p14:sldIdLst>
             <p14:sldId id="267"/>
             <p14:sldId id="268"/>
@@ -168,12 +168,12 @@
             <p14:sldId id="272"/>
           </p14:sldIdLst>
         </p14:section>
-        <p14:section name="Close" id="{9fc42897-66b0-d488-9de3-cf2b5acf2140}">
+        <p14:section name="Close" id="{e4beb6ea-5896-b32a-7a35-3fa39edeeda7}">
           <p14:sldIdLst>
             <p14:sldId id="273"/>
           </p14:sldIdLst>
         </p14:section>
-        <p14:section name="Answers" id="{09edca79-b202-1754-0283-110047f57621}">
+        <p14:section name="Answers" id="{cd03d218-6ee2-7298-82b1-98a5ba2a4b86}">
           <p14:sldIdLst>
             <p14:sldId id="274"/>
             <p14:sldId id="275"/>
@@ -1518,7 +1518,7 @@
             <a:r>
               <a:rPr lang="en-US" dirty="0"/>
               <a:t>Answers — task 1: Decode the implicit opinion. Reveal the answer; pupils mark their own work in a different colour, then read the "why" together. Same destination for every lane, so one answer serves the whole class.
-Answer: B   “I wiped the table with my sleeve before I sat down, and waited eleven minutes for someone to notice me.”
+Answer: D   “I wiped the table with my sleeve before I sat down, and waited eleven minutes for someone to notice me.”
 Why: Wiping the table with a sleeve and waiting eleven minutes imply dirt and rudeness without stating them. The first sentence states them; the other two are plain facts.
 Ask a Support pupil to explain one step, and a Stretch pupil to share their extension.</a:t>
             </a:r>
@@ -1610,7 +1610,7 @@
               <a:rPr lang="en-US" dirty="0"/>
               <a:t>Do now — retrieval. Silent, no notes, no help: recall comes before any support. Give about four minutes.
 1. An opinion that is suggested through word choices but not stated directly is ___.  →  implicit
-2. In DAFOREST, what does the D stand for?  →  A   Direct address
+2. In DAFOREST, what does the D stand for?  →  C   Direct address
 3. Why should an opinion article include a counter-argument?  →  A   To show you have considered the other side, and to answer it
 Circulate: who gets 3/3 (Stretch route), 2/3 (Core), 0–1 (Support)? Use this to route pupils later in the lesson.</a:t>
             </a:r>
@@ -1884,7 +1884,7 @@
               <a:rPr lang="en-US" dirty="0"/>
               <a:t>Answers — pupils mark their own in a different colour, then hands up for 3/3, 2/3, 1/3.
 1. implicit. Implicit means suggested, not directly expressed; explicit means stated clearly.
-2. A   Direct address. Direct address speaks straight to the reader with ‘you’ or ‘we’, making them feel involved.
+2. C   Direct address. Direct address speaks straight to the reader with ‘you’ or ‘we’, making them feel involved.
 3. A   To show you have considered the other side, and to answer it. Addressing the counter-argument strengthens the writer’s viewpoint: the reader sees both sides have been weighed.
 Say the route each score points to: 3/3 Stretch, 2/3 Core, 0–1 Support. Pupils may choose to move up.</a:t>
             </a:r>
@@ -5843,7 +5843,7 @@
                 <a:ea typeface="Calibri" pitchFamily="34" charset="-122"/>
                 <a:cs typeface="Calibri" pitchFamily="34" charset="-120"/>
               </a:rPr>
-              <a:t>“The café was dirty and the staff were rude.”</a:t>
+              <a:t>The café opens at nine and closes at five.</a:t>
             </a:r>
             <a:endParaRPr lang="en-US" sz="2600" dirty="0"/>
           </a:p>
@@ -5880,7 +5880,7 @@
                 <a:ea typeface="Calibri" pitchFamily="34" charset="-122"/>
                 <a:cs typeface="Calibri" pitchFamily="34" charset="-120"/>
               </a:rPr>
-              <a:t>“I wiped the table with my sleeve before I sat down, and waited eleven minutes for someone to notice me.”</a:t>
+              <a:t>“The café was dirty and the staff were rude.”</a:t>
             </a:r>
             <a:endParaRPr lang="en-US" sz="2600" dirty="0"/>
           </a:p>
@@ -5954,7 +5954,7 @@
                 <a:ea typeface="Calibri" pitchFamily="34" charset="-122"/>
                 <a:cs typeface="Calibri" pitchFamily="34" charset="-120"/>
               </a:rPr>
-              <a:t>The café opens at nine and closes at five.</a:t>
+              <a:t>“I wiped the table with my sleeve before I sat down, and waited eleven minutes for someone to notice me.”</a:t>
             </a:r>
             <a:endParaRPr lang="en-US" sz="2600" dirty="0"/>
           </a:p>
@@ -10990,7 +10990,7 @@
                 <a:ea typeface="Cambria" pitchFamily="34" charset="-122"/>
                 <a:cs typeface="Cambria" pitchFamily="34" charset="-120"/>
               </a:rPr>
-              <a:t>B   “I wiped the table with my sleeve before I sat down, and waited eleven minutes for someone to notice me.”</a:t>
+              <a:t>D   “I wiped the table with my sleeve before I sat down, and waited eleven minutes for someone to notice me.”</a:t>
             </a:r>
             <a:endParaRPr lang="en-US" sz="1800" dirty="0"/>
           </a:p>
@@ -11722,7 +11722,7 @@
                 <a:ea typeface="Calibri" pitchFamily="34" charset="-122"/>
                 <a:cs typeface="Calibri" pitchFamily="34" charset="-120"/>
               </a:rPr>
-              <a:t>Direct address</a:t>
+              <a:t>Description</a:t>
             </a:r>
             <a:endParaRPr lang="en-US" sz="2400" dirty="0"/>
           </a:p>
@@ -11759,7 +11759,7 @@
                 <a:ea typeface="Calibri" pitchFamily="34" charset="-122"/>
                 <a:cs typeface="Calibri" pitchFamily="34" charset="-120"/>
               </a:rPr>
-              <a:t>Description</a:t>
+              <a:t>Dialogue</a:t>
             </a:r>
             <a:endParaRPr lang="en-US" sz="2400" dirty="0"/>
           </a:p>
@@ -11796,7 +11796,7 @@
                 <a:ea typeface="Calibri" pitchFamily="34" charset="-122"/>
                 <a:cs typeface="Calibri" pitchFamily="34" charset="-120"/>
               </a:rPr>
-              <a:t>Dialogue</a:t>
+              <a:t>Direct address</a:t>
             </a:r>
             <a:endParaRPr lang="en-US" sz="2400" dirty="0"/>
           </a:p>
@@ -12074,7 +12074,7 @@
                 <a:ea typeface="Calibri" pitchFamily="34" charset="-122"/>
                 <a:cs typeface="Calibri" pitchFamily="34" charset="-120"/>
               </a:rPr>
-              <a:t>To confuse the reader about what you think</a:t>
+              <a:t>To fill space when you run out of ideas</a:t>
             </a:r>
             <a:endParaRPr lang="en-US" sz="2200" dirty="0"/>
           </a:p>
@@ -12111,7 +12111,7 @@
                 <a:ea typeface="Calibri" pitchFamily="34" charset="-122"/>
                 <a:cs typeface="Calibri" pitchFamily="34" charset="-120"/>
               </a:rPr>
-              <a:t>To fill space when you run out of ideas</a:t>
+              <a:t>Because articles must have exactly one argument</a:t>
             </a:r>
             <a:endParaRPr lang="en-US" sz="2200" dirty="0"/>
           </a:p>
@@ -12148,7 +12148,7 @@
                 <a:ea typeface="Calibri" pitchFamily="34" charset="-122"/>
                 <a:cs typeface="Calibri" pitchFamily="34" charset="-120"/>
               </a:rPr>
-              <a:t>Because articles must have exactly one argument</a:t>
+              <a:t>To confuse the reader about what you think</a:t>
             </a:r>
             <a:endParaRPr lang="en-US" sz="2200" dirty="0"/>
           </a:p>
@@ -13814,11 +13814,11 @@
         <p:spPr>
           <a:xfrm>
             <a:off x="3642284" y="2355677"/>
-            <a:ext cx="2270684" cy="955040"/>
+            <a:ext cx="2270684" cy="614172"/>
           </a:xfrm>
           <a:prstGeom prst="roundRect">
             <a:avLst>
-              <a:gd name="adj" fmla="val 11489"/>
+              <a:gd name="adj" fmla="val 17866"/>
             </a:avLst>
           </a:prstGeom>
           <a:solidFill>
@@ -13841,7 +13841,7 @@
         <p:spPr>
           <a:xfrm>
             <a:off x="3733724" y="2428829"/>
-            <a:ext cx="2087804" cy="808736"/>
+            <a:ext cx="2087804" cy="467868"/>
           </a:xfrm>
           <a:prstGeom prst="rect">
             <a:avLst/>
@@ -13865,7 +13865,7 @@
                 <a:ea typeface="Calibri" pitchFamily="34" charset="-122"/>
                 <a:cs typeface="Calibri" pitchFamily="34" charset="-120"/>
               </a:rPr>
-              <a:t>A   Direct address</a:t>
+              <a:t>C   Direct address</a:t>
             </a:r>
             <a:endParaRPr lang="en-US" sz="2200" dirty="0"/>
           </a:p>
@@ -13879,8 +13879,8 @@
         </p:nvSpPr>
         <p:spPr>
           <a:xfrm>
-            <a:off x="3642284" y="3493597"/>
-            <a:ext cx="2270684" cy="2514011"/>
+            <a:off x="3642284" y="3152729"/>
+            <a:ext cx="2270684" cy="2854879"/>
           </a:xfrm>
           <a:prstGeom prst="rect">
             <a:avLst/>

--- a/decks/englang-opinion/englang-opinion_ch6_persuade-and-imply.pptx
+++ b/decks/englang-opinion/englang-opinion_ch6_persuade-and-imply.pptx
@@ -127,30 +127,30 @@
   <p:extLst>
     <p:ext uri="{521415D9-36F7-43E2-AB2F-B90AF26B5E84}">
       <p14:sectionLst xmlns:p14="http://schemas.microsoft.com/office/powerpoint/2010/main">
-        <p14:section name="Opening" id="{b951beae-5e64-8ce4-2f25-a55c2cb5eb0d}">
+        <p14:section name="Opening" id="{450a7fec-48de-7d12-7328-de1c1d27e2c0}">
           <p14:sldIdLst>
             <p14:sldId id="256"/>
           </p14:sldIdLst>
         </p14:section>
-        <p14:section name="Gate" id="{5fea84d2-ac33-04a7-455c-06516c084113}">
+        <p14:section name="Gate" id="{707d0149-f1a0-d289-300a-702a9341724e}">
           <p14:sldIdLst>
             <p14:sldId id="257"/>
             <p14:sldId id="258"/>
           </p14:sldIdLst>
         </p14:section>
-        <p14:section name="Pre-teach" id="{b4e1fe19-0a9c-6aa6-465f-94554a418f1e}">
+        <p14:section name="Pre-teach" id="{826c289c-fdd8-eeff-d135-9e6e9701e2a5}">
           <p14:sldIdLst>
             <p14:sldId id="259"/>
             <p14:sldId id="260"/>
           </p14:sldIdLst>
         </p14:section>
-        <p14:section name="Read-along" id="{e6f50059-da89-73cb-634c-4e168f57472b}">
+        <p14:section name="Read-along" id="{2c14586a-d3e7-fda3-53ea-328c079540a2}">
           <p14:sldIdLst>
             <p14:sldId id="261"/>
             <p14:sldId id="262"/>
           </p14:sldIdLst>
         </p14:section>
-        <p14:section name="Teach" id="{4627cfcb-53fa-52c9-8285-f5c15b6aca0f}">
+        <p14:section name="Teach" id="{2aae72a8-1926-51fe-2334-0894256483be}">
           <p14:sldIdLst>
             <p14:sldId id="263"/>
             <p14:sldId id="264"/>
@@ -158,7 +158,7 @@
             <p14:sldId id="266"/>
           </p14:sldIdLst>
         </p14:section>
-        <p14:section name="Routes" id="{391cb517-84cf-84bc-a9d9-43260ff2f754}">
+        <p14:section name="Routes" id="{d8b87902-91ce-75f6-f7a4-f9f999533b22}">
           <p14:sldIdLst>
             <p14:sldId id="267"/>
             <p14:sldId id="268"/>
@@ -168,12 +168,12 @@
             <p14:sldId id="272"/>
           </p14:sldIdLst>
         </p14:section>
-        <p14:section name="Close" id="{e4beb6ea-5896-b32a-7a35-3fa39edeeda7}">
+        <p14:section name="Close" id="{0f04c5c5-9d88-96e7-7786-9d79cab333d5}">
           <p14:sldIdLst>
             <p14:sldId id="273"/>
           </p14:sldIdLst>
         </p14:section>
-        <p14:section name="Answers" id="{cd03d218-6ee2-7298-82b1-98a5ba2a4b86}">
+        <p14:section name="Answers" id="{f5caa577-70d7-c05f-c90b-882076476aea}">
           <p14:sldIdLst>
             <p14:sldId id="274"/>
             <p14:sldId id="275"/>
